--- a/src/GpgSigningFlow.pptx
+++ b/src/GpgSigningFlow.pptx
@@ -2,12 +2,12 @@
 <file path=ppt/presentation.xml><?xml version="1.0" encoding="utf-8"?>
 <p:presentation xmlns:a="http://schemas.openxmlformats.org/drawingml/2006/main" xmlns:r="http://schemas.openxmlformats.org/officeDocument/2006/relationships" xmlns:p="http://schemas.openxmlformats.org/presentationml/2006/main" saveSubsetFonts="1">
   <p:sldMasterIdLst>
-    <p:sldMasterId id="2147483684" r:id="rId1"/>
+    <p:sldMasterId id="2147483708" r:id="rId1"/>
   </p:sldMasterIdLst>
   <p:sldIdLst>
     <p:sldId id="256" r:id="rId2"/>
   </p:sldIdLst>
-  <p:sldSz cx="10439400" cy="2879725"/>
+  <p:sldSz cx="10080625" cy="1800225"/>
   <p:notesSz cx="6858000" cy="9144000"/>
   <p:defaultTextStyle>
     <a:defPPr>
@@ -141,15 +141,15 @@
         </p:nvSpPr>
         <p:spPr>
           <a:xfrm>
-            <a:off x="1304925" y="471289"/>
-            <a:ext cx="7829550" cy="1002571"/>
+            <a:off x="1260078" y="294620"/>
+            <a:ext cx="7560469" cy="626745"/>
           </a:xfrm>
         </p:spPr>
         <p:txBody>
           <a:bodyPr anchor="b"/>
           <a:lstStyle>
             <a:lvl1pPr algn="ctr">
-              <a:defRPr sz="2519"/>
+              <a:defRPr sz="1575"/>
             </a:lvl1pPr>
           </a:lstStyle>
           <a:p>
@@ -173,8 +173,8 @@
         </p:nvSpPr>
         <p:spPr>
           <a:xfrm>
-            <a:off x="1304925" y="1512522"/>
-            <a:ext cx="7829550" cy="695267"/>
+            <a:off x="1260078" y="945535"/>
+            <a:ext cx="7560469" cy="434638"/>
           </a:xfrm>
         </p:spPr>
         <p:txBody>
@@ -182,39 +182,39 @@
           <a:lstStyle>
             <a:lvl1pPr marL="0" indent="0" algn="ctr">
               <a:buNone/>
-              <a:defRPr sz="1008"/>
+              <a:defRPr sz="630"/>
             </a:lvl1pPr>
-            <a:lvl2pPr marL="191978" indent="0" algn="ctr">
-              <a:buNone/>
-              <a:defRPr sz="840"/>
+            <a:lvl2pPr marL="120015" indent="0" algn="ctr">
+              <a:buNone/>
+              <a:defRPr sz="525"/>
             </a:lvl2pPr>
-            <a:lvl3pPr marL="383957" indent="0" algn="ctr">
-              <a:buNone/>
-              <a:defRPr sz="756"/>
+            <a:lvl3pPr marL="240030" indent="0" algn="ctr">
+              <a:buNone/>
+              <a:defRPr sz="472"/>
             </a:lvl3pPr>
-            <a:lvl4pPr marL="575935" indent="0" algn="ctr">
-              <a:buNone/>
-              <a:defRPr sz="672"/>
+            <a:lvl4pPr marL="360045" indent="0" algn="ctr">
+              <a:buNone/>
+              <a:defRPr sz="420"/>
             </a:lvl4pPr>
-            <a:lvl5pPr marL="767913" indent="0" algn="ctr">
-              <a:buNone/>
-              <a:defRPr sz="672"/>
+            <a:lvl5pPr marL="480060" indent="0" algn="ctr">
+              <a:buNone/>
+              <a:defRPr sz="420"/>
             </a:lvl5pPr>
-            <a:lvl6pPr marL="959891" indent="0" algn="ctr">
-              <a:buNone/>
-              <a:defRPr sz="672"/>
+            <a:lvl6pPr marL="600075" indent="0" algn="ctr">
+              <a:buNone/>
+              <a:defRPr sz="420"/>
             </a:lvl6pPr>
-            <a:lvl7pPr marL="1151870" indent="0" algn="ctr">
-              <a:buNone/>
-              <a:defRPr sz="672"/>
+            <a:lvl7pPr marL="720090" indent="0" algn="ctr">
+              <a:buNone/>
+              <a:defRPr sz="420"/>
             </a:lvl7pPr>
-            <a:lvl8pPr marL="1343848" indent="0" algn="ctr">
-              <a:buNone/>
-              <a:defRPr sz="672"/>
+            <a:lvl8pPr marL="840105" indent="0" algn="ctr">
+              <a:buNone/>
+              <a:defRPr sz="420"/>
             </a:lvl8pPr>
-            <a:lvl9pPr marL="1535826" indent="0" algn="ctr">
-              <a:buNone/>
-              <a:defRPr sz="672"/>
+            <a:lvl9pPr marL="960120" indent="0" algn="ctr">
+              <a:buNone/>
+              <a:defRPr sz="420"/>
             </a:lvl9pPr>
           </a:lstStyle>
           <a:p>
@@ -243,7 +243,7 @@
           <a:p>
             <a:fld id="{98DAC7ED-0124-4475-AB10-3A7CB843D580}" type="datetimeFigureOut">
               <a:rPr lang="de-AT" smtClean="0"/>
-              <a:t>14.04.2023</a:t>
+              <a:t>16.06.2026</a:t>
             </a:fld>
             <a:endParaRPr lang="de-AT"/>
           </a:p>
@@ -294,7 +294,7 @@
     </p:spTree>
     <p:extLst>
       <p:ext uri="{BB962C8B-B14F-4D97-AF65-F5344CB8AC3E}">
-        <p14:creationId xmlns:p14="http://schemas.microsoft.com/office/powerpoint/2010/main" val="3966344307"/>
+        <p14:creationId xmlns:p14="http://schemas.microsoft.com/office/powerpoint/2010/main" val="1844429577"/>
       </p:ext>
     </p:extLst>
   </p:cSld>
@@ -413,7 +413,7 @@
           <a:p>
             <a:fld id="{98DAC7ED-0124-4475-AB10-3A7CB843D580}" type="datetimeFigureOut">
               <a:rPr lang="de-AT" smtClean="0"/>
-              <a:t>14.04.2023</a:t>
+              <a:t>16.06.2026</a:t>
             </a:fld>
             <a:endParaRPr lang="de-AT"/>
           </a:p>
@@ -464,7 +464,7 @@
     </p:spTree>
     <p:extLst>
       <p:ext uri="{BB962C8B-B14F-4D97-AF65-F5344CB8AC3E}">
-        <p14:creationId xmlns:p14="http://schemas.microsoft.com/office/powerpoint/2010/main" val="2027568606"/>
+        <p14:creationId xmlns:p14="http://schemas.microsoft.com/office/powerpoint/2010/main" val="368446022"/>
       </p:ext>
     </p:extLst>
   </p:cSld>
@@ -503,8 +503,8 @@
         </p:nvSpPr>
         <p:spPr>
           <a:xfrm>
-            <a:off x="7470695" y="153319"/>
-            <a:ext cx="2250996" cy="2440434"/>
+            <a:off x="7213947" y="95846"/>
+            <a:ext cx="2173635" cy="1525607"/>
           </a:xfrm>
         </p:spPr>
         <p:txBody>
@@ -531,8 +531,8 @@
         </p:nvSpPr>
         <p:spPr>
           <a:xfrm>
-            <a:off x="717709" y="153319"/>
-            <a:ext cx="6622494" cy="2440434"/>
+            <a:off x="693043" y="95846"/>
+            <a:ext cx="6394896" cy="1525607"/>
           </a:xfrm>
         </p:spPr>
         <p:txBody>
@@ -593,7 +593,7 @@
           <a:p>
             <a:fld id="{98DAC7ED-0124-4475-AB10-3A7CB843D580}" type="datetimeFigureOut">
               <a:rPr lang="de-AT" smtClean="0"/>
-              <a:t>14.04.2023</a:t>
+              <a:t>16.06.2026</a:t>
             </a:fld>
             <a:endParaRPr lang="de-AT"/>
           </a:p>
@@ -644,7 +644,7 @@
     </p:spTree>
     <p:extLst>
       <p:ext uri="{BB962C8B-B14F-4D97-AF65-F5344CB8AC3E}">
-        <p14:creationId xmlns:p14="http://schemas.microsoft.com/office/powerpoint/2010/main" val="1083268594"/>
+        <p14:creationId xmlns:p14="http://schemas.microsoft.com/office/powerpoint/2010/main" val="489897311"/>
       </p:ext>
     </p:extLst>
   </p:cSld>
@@ -763,7 +763,7 @@
           <a:p>
             <a:fld id="{98DAC7ED-0124-4475-AB10-3A7CB843D580}" type="datetimeFigureOut">
               <a:rPr lang="de-AT" smtClean="0"/>
-              <a:t>14.04.2023</a:t>
+              <a:t>16.06.2026</a:t>
             </a:fld>
             <a:endParaRPr lang="de-AT"/>
           </a:p>
@@ -814,7 +814,7 @@
     </p:spTree>
     <p:extLst>
       <p:ext uri="{BB962C8B-B14F-4D97-AF65-F5344CB8AC3E}">
-        <p14:creationId xmlns:p14="http://schemas.microsoft.com/office/powerpoint/2010/main" val="3795543924"/>
+        <p14:creationId xmlns:p14="http://schemas.microsoft.com/office/powerpoint/2010/main" val="504631592"/>
       </p:ext>
     </p:extLst>
   </p:cSld>
@@ -853,15 +853,15 @@
         </p:nvSpPr>
         <p:spPr>
           <a:xfrm>
-            <a:off x="712271" y="717932"/>
-            <a:ext cx="9003983" cy="1197885"/>
+            <a:off x="687793" y="448807"/>
+            <a:ext cx="8694539" cy="748843"/>
           </a:xfrm>
         </p:spPr>
         <p:txBody>
           <a:bodyPr anchor="b"/>
           <a:lstStyle>
             <a:lvl1pPr>
-              <a:defRPr sz="2519"/>
+              <a:defRPr sz="1575"/>
             </a:lvl1pPr>
           </a:lstStyle>
           <a:p>
@@ -885,8 +885,8 @@
         </p:nvSpPr>
         <p:spPr>
           <a:xfrm>
-            <a:off x="712271" y="1927150"/>
-            <a:ext cx="9003983" cy="629940"/>
+            <a:off x="687793" y="1204734"/>
+            <a:ext cx="8694539" cy="393799"/>
           </a:xfrm>
         </p:spPr>
         <p:txBody>
@@ -894,7 +894,7 @@
           <a:lstStyle>
             <a:lvl1pPr marL="0" indent="0">
               <a:buNone/>
-              <a:defRPr sz="1008">
+              <a:defRPr sz="630">
                 <a:solidFill>
                   <a:schemeClr val="tx1">
                     <a:tint val="75000"/>
@@ -902,9 +902,9 @@
                 </a:solidFill>
               </a:defRPr>
             </a:lvl1pPr>
-            <a:lvl2pPr marL="191978" indent="0">
-              <a:buNone/>
-              <a:defRPr sz="840">
+            <a:lvl2pPr marL="120015" indent="0">
+              <a:buNone/>
+              <a:defRPr sz="525">
                 <a:solidFill>
                   <a:schemeClr val="tx1">
                     <a:tint val="75000"/>
@@ -912,9 +912,9 @@
                 </a:solidFill>
               </a:defRPr>
             </a:lvl2pPr>
-            <a:lvl3pPr marL="383957" indent="0">
-              <a:buNone/>
-              <a:defRPr sz="756">
+            <a:lvl3pPr marL="240030" indent="0">
+              <a:buNone/>
+              <a:defRPr sz="472">
                 <a:solidFill>
                   <a:schemeClr val="tx1">
                     <a:tint val="75000"/>
@@ -922,9 +922,9 @@
                 </a:solidFill>
               </a:defRPr>
             </a:lvl3pPr>
-            <a:lvl4pPr marL="575935" indent="0">
-              <a:buNone/>
-              <a:defRPr sz="672">
+            <a:lvl4pPr marL="360045" indent="0">
+              <a:buNone/>
+              <a:defRPr sz="420">
                 <a:solidFill>
                   <a:schemeClr val="tx1">
                     <a:tint val="75000"/>
@@ -932,9 +932,9 @@
                 </a:solidFill>
               </a:defRPr>
             </a:lvl4pPr>
-            <a:lvl5pPr marL="767913" indent="0">
-              <a:buNone/>
-              <a:defRPr sz="672">
+            <a:lvl5pPr marL="480060" indent="0">
+              <a:buNone/>
+              <a:defRPr sz="420">
                 <a:solidFill>
                   <a:schemeClr val="tx1">
                     <a:tint val="75000"/>
@@ -942,9 +942,9 @@
                 </a:solidFill>
               </a:defRPr>
             </a:lvl5pPr>
-            <a:lvl6pPr marL="959891" indent="0">
-              <a:buNone/>
-              <a:defRPr sz="672">
+            <a:lvl6pPr marL="600075" indent="0">
+              <a:buNone/>
+              <a:defRPr sz="420">
                 <a:solidFill>
                   <a:schemeClr val="tx1">
                     <a:tint val="75000"/>
@@ -952,9 +952,9 @@
                 </a:solidFill>
               </a:defRPr>
             </a:lvl6pPr>
-            <a:lvl7pPr marL="1151870" indent="0">
-              <a:buNone/>
-              <a:defRPr sz="672">
+            <a:lvl7pPr marL="720090" indent="0">
+              <a:buNone/>
+              <a:defRPr sz="420">
                 <a:solidFill>
                   <a:schemeClr val="tx1">
                     <a:tint val="75000"/>
@@ -962,9 +962,9 @@
                 </a:solidFill>
               </a:defRPr>
             </a:lvl7pPr>
-            <a:lvl8pPr marL="1343848" indent="0">
-              <a:buNone/>
-              <a:defRPr sz="672">
+            <a:lvl8pPr marL="840105" indent="0">
+              <a:buNone/>
+              <a:defRPr sz="420">
                 <a:solidFill>
                   <a:schemeClr val="tx1">
                     <a:tint val="75000"/>
@@ -972,9 +972,9 @@
                 </a:solidFill>
               </a:defRPr>
             </a:lvl8pPr>
-            <a:lvl9pPr marL="1535826" indent="0">
-              <a:buNone/>
-              <a:defRPr sz="672">
+            <a:lvl9pPr marL="960120" indent="0">
+              <a:buNone/>
+              <a:defRPr sz="420">
                 <a:solidFill>
                   <a:schemeClr val="tx1">
                     <a:tint val="75000"/>
@@ -1009,7 +1009,7 @@
           <a:p>
             <a:fld id="{98DAC7ED-0124-4475-AB10-3A7CB843D580}" type="datetimeFigureOut">
               <a:rPr lang="de-AT" smtClean="0"/>
-              <a:t>14.04.2023</a:t>
+              <a:t>16.06.2026</a:t>
             </a:fld>
             <a:endParaRPr lang="de-AT"/>
           </a:p>
@@ -1060,7 +1060,7 @@
     </p:spTree>
     <p:extLst>
       <p:ext uri="{BB962C8B-B14F-4D97-AF65-F5344CB8AC3E}">
-        <p14:creationId xmlns:p14="http://schemas.microsoft.com/office/powerpoint/2010/main" val="203337476"/>
+        <p14:creationId xmlns:p14="http://schemas.microsoft.com/office/powerpoint/2010/main" val="3712860233"/>
       </p:ext>
     </p:extLst>
   </p:cSld>
@@ -1122,8 +1122,8 @@
         </p:nvSpPr>
         <p:spPr>
           <a:xfrm>
-            <a:off x="717709" y="766593"/>
-            <a:ext cx="4436745" cy="1827159"/>
+            <a:off x="693043" y="479227"/>
+            <a:ext cx="4284266" cy="1142226"/>
           </a:xfrm>
         </p:spPr>
         <p:txBody>
@@ -1179,8 +1179,8 @@
         </p:nvSpPr>
         <p:spPr>
           <a:xfrm>
-            <a:off x="5284946" y="766593"/>
-            <a:ext cx="4436745" cy="1827159"/>
+            <a:off x="5103316" y="479227"/>
+            <a:ext cx="4284266" cy="1142226"/>
           </a:xfrm>
         </p:spPr>
         <p:txBody>
@@ -1241,7 +1241,7 @@
           <a:p>
             <a:fld id="{98DAC7ED-0124-4475-AB10-3A7CB843D580}" type="datetimeFigureOut">
               <a:rPr lang="de-AT" smtClean="0"/>
-              <a:t>14.04.2023</a:t>
+              <a:t>16.06.2026</a:t>
             </a:fld>
             <a:endParaRPr lang="de-AT"/>
           </a:p>
@@ -1292,7 +1292,7 @@
     </p:spTree>
     <p:extLst>
       <p:ext uri="{BB962C8B-B14F-4D97-AF65-F5344CB8AC3E}">
-        <p14:creationId xmlns:p14="http://schemas.microsoft.com/office/powerpoint/2010/main" val="2385600549"/>
+        <p14:creationId xmlns:p14="http://schemas.microsoft.com/office/powerpoint/2010/main" val="2480716852"/>
       </p:ext>
     </p:extLst>
   </p:cSld>
@@ -1331,8 +1331,8 @@
         </p:nvSpPr>
         <p:spPr>
           <a:xfrm>
-            <a:off x="719068" y="153319"/>
-            <a:ext cx="9003983" cy="556614"/>
+            <a:off x="694356" y="95846"/>
+            <a:ext cx="8694539" cy="347960"/>
           </a:xfrm>
         </p:spPr>
         <p:txBody>
@@ -1359,8 +1359,8 @@
         </p:nvSpPr>
         <p:spPr>
           <a:xfrm>
-            <a:off x="719069" y="705933"/>
-            <a:ext cx="4416355" cy="345967"/>
+            <a:off x="694357" y="441305"/>
+            <a:ext cx="4264576" cy="216277"/>
           </a:xfrm>
         </p:spPr>
         <p:txBody>
@@ -1368,39 +1368,39 @@
           <a:lstStyle>
             <a:lvl1pPr marL="0" indent="0">
               <a:buNone/>
-              <a:defRPr sz="1008" b="1"/>
+              <a:defRPr sz="630" b="1"/>
             </a:lvl1pPr>
-            <a:lvl2pPr marL="191978" indent="0">
-              <a:buNone/>
-              <a:defRPr sz="840" b="1"/>
+            <a:lvl2pPr marL="120015" indent="0">
+              <a:buNone/>
+              <a:defRPr sz="525" b="1"/>
             </a:lvl2pPr>
-            <a:lvl3pPr marL="383957" indent="0">
-              <a:buNone/>
-              <a:defRPr sz="756" b="1"/>
+            <a:lvl3pPr marL="240030" indent="0">
+              <a:buNone/>
+              <a:defRPr sz="472" b="1"/>
             </a:lvl3pPr>
-            <a:lvl4pPr marL="575935" indent="0">
-              <a:buNone/>
-              <a:defRPr sz="672" b="1"/>
+            <a:lvl4pPr marL="360045" indent="0">
+              <a:buNone/>
+              <a:defRPr sz="420" b="1"/>
             </a:lvl4pPr>
-            <a:lvl5pPr marL="767913" indent="0">
-              <a:buNone/>
-              <a:defRPr sz="672" b="1"/>
+            <a:lvl5pPr marL="480060" indent="0">
+              <a:buNone/>
+              <a:defRPr sz="420" b="1"/>
             </a:lvl5pPr>
-            <a:lvl6pPr marL="959891" indent="0">
-              <a:buNone/>
-              <a:defRPr sz="672" b="1"/>
+            <a:lvl6pPr marL="600075" indent="0">
+              <a:buNone/>
+              <a:defRPr sz="420" b="1"/>
             </a:lvl6pPr>
-            <a:lvl7pPr marL="1151870" indent="0">
-              <a:buNone/>
-              <a:defRPr sz="672" b="1"/>
+            <a:lvl7pPr marL="720090" indent="0">
+              <a:buNone/>
+              <a:defRPr sz="420" b="1"/>
             </a:lvl7pPr>
-            <a:lvl8pPr marL="1343848" indent="0">
-              <a:buNone/>
-              <a:defRPr sz="672" b="1"/>
+            <a:lvl8pPr marL="840105" indent="0">
+              <a:buNone/>
+              <a:defRPr sz="420" b="1"/>
             </a:lvl8pPr>
-            <a:lvl9pPr marL="1535826" indent="0">
-              <a:buNone/>
-              <a:defRPr sz="672" b="1"/>
+            <a:lvl9pPr marL="960120" indent="0">
+              <a:buNone/>
+              <a:defRPr sz="420" b="1"/>
             </a:lvl9pPr>
           </a:lstStyle>
           <a:p>
@@ -1424,8 +1424,8 @@
         </p:nvSpPr>
         <p:spPr>
           <a:xfrm>
-            <a:off x="719069" y="1051899"/>
-            <a:ext cx="4416355" cy="1547186"/>
+            <a:off x="694357" y="657582"/>
+            <a:ext cx="4264576" cy="967204"/>
           </a:xfrm>
         </p:spPr>
         <p:txBody>
@@ -1481,8 +1481,8 @@
         </p:nvSpPr>
         <p:spPr>
           <a:xfrm>
-            <a:off x="5284946" y="705933"/>
-            <a:ext cx="4438105" cy="345967"/>
+            <a:off x="5103316" y="441305"/>
+            <a:ext cx="4285579" cy="216277"/>
           </a:xfrm>
         </p:spPr>
         <p:txBody>
@@ -1490,39 +1490,39 @@
           <a:lstStyle>
             <a:lvl1pPr marL="0" indent="0">
               <a:buNone/>
-              <a:defRPr sz="1008" b="1"/>
+              <a:defRPr sz="630" b="1"/>
             </a:lvl1pPr>
-            <a:lvl2pPr marL="191978" indent="0">
-              <a:buNone/>
-              <a:defRPr sz="840" b="1"/>
+            <a:lvl2pPr marL="120015" indent="0">
+              <a:buNone/>
+              <a:defRPr sz="525" b="1"/>
             </a:lvl2pPr>
-            <a:lvl3pPr marL="383957" indent="0">
-              <a:buNone/>
-              <a:defRPr sz="756" b="1"/>
+            <a:lvl3pPr marL="240030" indent="0">
+              <a:buNone/>
+              <a:defRPr sz="472" b="1"/>
             </a:lvl3pPr>
-            <a:lvl4pPr marL="575935" indent="0">
-              <a:buNone/>
-              <a:defRPr sz="672" b="1"/>
+            <a:lvl4pPr marL="360045" indent="0">
+              <a:buNone/>
+              <a:defRPr sz="420" b="1"/>
             </a:lvl4pPr>
-            <a:lvl5pPr marL="767913" indent="0">
-              <a:buNone/>
-              <a:defRPr sz="672" b="1"/>
+            <a:lvl5pPr marL="480060" indent="0">
+              <a:buNone/>
+              <a:defRPr sz="420" b="1"/>
             </a:lvl5pPr>
-            <a:lvl6pPr marL="959891" indent="0">
-              <a:buNone/>
-              <a:defRPr sz="672" b="1"/>
+            <a:lvl6pPr marL="600075" indent="0">
+              <a:buNone/>
+              <a:defRPr sz="420" b="1"/>
             </a:lvl6pPr>
-            <a:lvl7pPr marL="1151870" indent="0">
-              <a:buNone/>
-              <a:defRPr sz="672" b="1"/>
+            <a:lvl7pPr marL="720090" indent="0">
+              <a:buNone/>
+              <a:defRPr sz="420" b="1"/>
             </a:lvl7pPr>
-            <a:lvl8pPr marL="1343848" indent="0">
-              <a:buNone/>
-              <a:defRPr sz="672" b="1"/>
+            <a:lvl8pPr marL="840105" indent="0">
+              <a:buNone/>
+              <a:defRPr sz="420" b="1"/>
             </a:lvl8pPr>
-            <a:lvl9pPr marL="1535826" indent="0">
-              <a:buNone/>
-              <a:defRPr sz="672" b="1"/>
+            <a:lvl9pPr marL="960120" indent="0">
+              <a:buNone/>
+              <a:defRPr sz="420" b="1"/>
             </a:lvl9pPr>
           </a:lstStyle>
           <a:p>
@@ -1546,8 +1546,8 @@
         </p:nvSpPr>
         <p:spPr>
           <a:xfrm>
-            <a:off x="5284946" y="1051899"/>
-            <a:ext cx="4438105" cy="1547186"/>
+            <a:off x="5103316" y="657582"/>
+            <a:ext cx="4285579" cy="967204"/>
           </a:xfrm>
         </p:spPr>
         <p:txBody>
@@ -1608,7 +1608,7 @@
           <a:p>
             <a:fld id="{98DAC7ED-0124-4475-AB10-3A7CB843D580}" type="datetimeFigureOut">
               <a:rPr lang="de-AT" smtClean="0"/>
-              <a:t>14.04.2023</a:t>
+              <a:t>16.06.2026</a:t>
             </a:fld>
             <a:endParaRPr lang="de-AT"/>
           </a:p>
@@ -1659,7 +1659,7 @@
     </p:spTree>
     <p:extLst>
       <p:ext uri="{BB962C8B-B14F-4D97-AF65-F5344CB8AC3E}">
-        <p14:creationId xmlns:p14="http://schemas.microsoft.com/office/powerpoint/2010/main" val="3333690129"/>
+        <p14:creationId xmlns:p14="http://schemas.microsoft.com/office/powerpoint/2010/main" val="3350271060"/>
       </p:ext>
     </p:extLst>
   </p:cSld>
@@ -1726,7 +1726,7 @@
           <a:p>
             <a:fld id="{98DAC7ED-0124-4475-AB10-3A7CB843D580}" type="datetimeFigureOut">
               <a:rPr lang="de-AT" smtClean="0"/>
-              <a:t>14.04.2023</a:t>
+              <a:t>16.06.2026</a:t>
             </a:fld>
             <a:endParaRPr lang="de-AT"/>
           </a:p>
@@ -1777,7 +1777,7 @@
     </p:spTree>
     <p:extLst>
       <p:ext uri="{BB962C8B-B14F-4D97-AF65-F5344CB8AC3E}">
-        <p14:creationId xmlns:p14="http://schemas.microsoft.com/office/powerpoint/2010/main" val="217915316"/>
+        <p14:creationId xmlns:p14="http://schemas.microsoft.com/office/powerpoint/2010/main" val="2804993697"/>
       </p:ext>
     </p:extLst>
   </p:cSld>
@@ -1821,7 +1821,7 @@
           <a:p>
             <a:fld id="{98DAC7ED-0124-4475-AB10-3A7CB843D580}" type="datetimeFigureOut">
               <a:rPr lang="de-AT" smtClean="0"/>
-              <a:t>14.04.2023</a:t>
+              <a:t>16.06.2026</a:t>
             </a:fld>
             <a:endParaRPr lang="de-AT"/>
           </a:p>
@@ -1872,7 +1872,7 @@
     </p:spTree>
     <p:extLst>
       <p:ext uri="{BB962C8B-B14F-4D97-AF65-F5344CB8AC3E}">
-        <p14:creationId xmlns:p14="http://schemas.microsoft.com/office/powerpoint/2010/main" val="2640991816"/>
+        <p14:creationId xmlns:p14="http://schemas.microsoft.com/office/powerpoint/2010/main" val="2854927136"/>
       </p:ext>
     </p:extLst>
   </p:cSld>
@@ -1911,15 +1911,15 @@
         </p:nvSpPr>
         <p:spPr>
           <a:xfrm>
-            <a:off x="719069" y="191982"/>
-            <a:ext cx="3366978" cy="671936"/>
+            <a:off x="694356" y="120015"/>
+            <a:ext cx="3251264" cy="420053"/>
           </a:xfrm>
         </p:spPr>
         <p:txBody>
           <a:bodyPr anchor="b"/>
           <a:lstStyle>
             <a:lvl1pPr>
-              <a:defRPr sz="1344"/>
+              <a:defRPr sz="840"/>
             </a:lvl1pPr>
           </a:lstStyle>
           <a:p>
@@ -1943,39 +1943,39 @@
         </p:nvSpPr>
         <p:spPr>
           <a:xfrm>
-            <a:off x="4438105" y="414627"/>
-            <a:ext cx="5284946" cy="2046471"/>
+            <a:off x="4285579" y="259199"/>
+            <a:ext cx="5103316" cy="1279327"/>
           </a:xfrm>
         </p:spPr>
         <p:txBody>
           <a:bodyPr/>
           <a:lstStyle>
             <a:lvl1pPr>
-              <a:defRPr sz="1344"/>
+              <a:defRPr sz="840"/>
             </a:lvl1pPr>
             <a:lvl2pPr>
-              <a:defRPr sz="1176"/>
+              <a:defRPr sz="735"/>
             </a:lvl2pPr>
             <a:lvl3pPr>
-              <a:defRPr sz="1008"/>
+              <a:defRPr sz="630"/>
             </a:lvl3pPr>
             <a:lvl4pPr>
-              <a:defRPr sz="840"/>
+              <a:defRPr sz="525"/>
             </a:lvl4pPr>
             <a:lvl5pPr>
-              <a:defRPr sz="840"/>
+              <a:defRPr sz="525"/>
             </a:lvl5pPr>
             <a:lvl6pPr>
-              <a:defRPr sz="840"/>
+              <a:defRPr sz="525"/>
             </a:lvl6pPr>
             <a:lvl7pPr>
-              <a:defRPr sz="840"/>
+              <a:defRPr sz="525"/>
             </a:lvl7pPr>
             <a:lvl8pPr>
-              <a:defRPr sz="840"/>
+              <a:defRPr sz="525"/>
             </a:lvl8pPr>
             <a:lvl9pPr>
-              <a:defRPr sz="840"/>
+              <a:defRPr sz="525"/>
             </a:lvl9pPr>
           </a:lstStyle>
           <a:p>
@@ -2028,8 +2028,8 @@
         </p:nvSpPr>
         <p:spPr>
           <a:xfrm>
-            <a:off x="719069" y="863918"/>
-            <a:ext cx="3366978" cy="1600514"/>
+            <a:off x="694356" y="540067"/>
+            <a:ext cx="3251264" cy="1000542"/>
           </a:xfrm>
         </p:spPr>
         <p:txBody>
@@ -2037,39 +2037,39 @@
           <a:lstStyle>
             <a:lvl1pPr marL="0" indent="0">
               <a:buNone/>
-              <a:defRPr sz="672"/>
+              <a:defRPr sz="420"/>
             </a:lvl1pPr>
-            <a:lvl2pPr marL="191978" indent="0">
-              <a:buNone/>
-              <a:defRPr sz="588"/>
+            <a:lvl2pPr marL="120015" indent="0">
+              <a:buNone/>
+              <a:defRPr sz="368"/>
             </a:lvl2pPr>
-            <a:lvl3pPr marL="383957" indent="0">
-              <a:buNone/>
-              <a:defRPr sz="504"/>
+            <a:lvl3pPr marL="240030" indent="0">
+              <a:buNone/>
+              <a:defRPr sz="315"/>
             </a:lvl3pPr>
-            <a:lvl4pPr marL="575935" indent="0">
-              <a:buNone/>
-              <a:defRPr sz="420"/>
+            <a:lvl4pPr marL="360045" indent="0">
+              <a:buNone/>
+              <a:defRPr sz="263"/>
             </a:lvl4pPr>
-            <a:lvl5pPr marL="767913" indent="0">
-              <a:buNone/>
-              <a:defRPr sz="420"/>
+            <a:lvl5pPr marL="480060" indent="0">
+              <a:buNone/>
+              <a:defRPr sz="263"/>
             </a:lvl5pPr>
-            <a:lvl6pPr marL="959891" indent="0">
-              <a:buNone/>
-              <a:defRPr sz="420"/>
+            <a:lvl6pPr marL="600075" indent="0">
+              <a:buNone/>
+              <a:defRPr sz="263"/>
             </a:lvl6pPr>
-            <a:lvl7pPr marL="1151870" indent="0">
-              <a:buNone/>
-              <a:defRPr sz="420"/>
+            <a:lvl7pPr marL="720090" indent="0">
+              <a:buNone/>
+              <a:defRPr sz="263"/>
             </a:lvl7pPr>
-            <a:lvl8pPr marL="1343848" indent="0">
-              <a:buNone/>
-              <a:defRPr sz="420"/>
+            <a:lvl8pPr marL="840105" indent="0">
+              <a:buNone/>
+              <a:defRPr sz="263"/>
             </a:lvl8pPr>
-            <a:lvl9pPr marL="1535826" indent="0">
-              <a:buNone/>
-              <a:defRPr sz="420"/>
+            <a:lvl9pPr marL="960120" indent="0">
+              <a:buNone/>
+              <a:defRPr sz="263"/>
             </a:lvl9pPr>
           </a:lstStyle>
           <a:p>
@@ -2098,7 +2098,7 @@
           <a:p>
             <a:fld id="{98DAC7ED-0124-4475-AB10-3A7CB843D580}" type="datetimeFigureOut">
               <a:rPr lang="de-AT" smtClean="0"/>
-              <a:t>14.04.2023</a:t>
+              <a:t>16.06.2026</a:t>
             </a:fld>
             <a:endParaRPr lang="de-AT"/>
           </a:p>
@@ -2149,7 +2149,7 @@
     </p:spTree>
     <p:extLst>
       <p:ext uri="{BB962C8B-B14F-4D97-AF65-F5344CB8AC3E}">
-        <p14:creationId xmlns:p14="http://schemas.microsoft.com/office/powerpoint/2010/main" val="1771001206"/>
+        <p14:creationId xmlns:p14="http://schemas.microsoft.com/office/powerpoint/2010/main" val="3740434897"/>
       </p:ext>
     </p:extLst>
   </p:cSld>
@@ -2188,15 +2188,15 @@
         </p:nvSpPr>
         <p:spPr>
           <a:xfrm>
-            <a:off x="719069" y="191982"/>
-            <a:ext cx="3366978" cy="671936"/>
+            <a:off x="694356" y="120015"/>
+            <a:ext cx="3251264" cy="420053"/>
           </a:xfrm>
         </p:spPr>
         <p:txBody>
           <a:bodyPr anchor="b"/>
           <a:lstStyle>
             <a:lvl1pPr>
-              <a:defRPr sz="1344"/>
+              <a:defRPr sz="840"/>
             </a:lvl1pPr>
           </a:lstStyle>
           <a:p>
@@ -2220,8 +2220,8 @@
         </p:nvSpPr>
         <p:spPr>
           <a:xfrm>
-            <a:off x="4438105" y="414627"/>
-            <a:ext cx="5284946" cy="2046471"/>
+            <a:off x="4285579" y="259199"/>
+            <a:ext cx="5103316" cy="1279327"/>
           </a:xfrm>
         </p:spPr>
         <p:txBody>
@@ -2229,39 +2229,39 @@
           <a:lstStyle>
             <a:lvl1pPr marL="0" indent="0">
               <a:buNone/>
-              <a:defRPr sz="1344"/>
+              <a:defRPr sz="840"/>
             </a:lvl1pPr>
-            <a:lvl2pPr marL="191978" indent="0">
-              <a:buNone/>
-              <a:defRPr sz="1176"/>
+            <a:lvl2pPr marL="120015" indent="0">
+              <a:buNone/>
+              <a:defRPr sz="735"/>
             </a:lvl2pPr>
-            <a:lvl3pPr marL="383957" indent="0">
-              <a:buNone/>
-              <a:defRPr sz="1008"/>
+            <a:lvl3pPr marL="240030" indent="0">
+              <a:buNone/>
+              <a:defRPr sz="630"/>
             </a:lvl3pPr>
-            <a:lvl4pPr marL="575935" indent="0">
-              <a:buNone/>
-              <a:defRPr sz="840"/>
+            <a:lvl4pPr marL="360045" indent="0">
+              <a:buNone/>
+              <a:defRPr sz="525"/>
             </a:lvl4pPr>
-            <a:lvl5pPr marL="767913" indent="0">
-              <a:buNone/>
-              <a:defRPr sz="840"/>
+            <a:lvl5pPr marL="480060" indent="0">
+              <a:buNone/>
+              <a:defRPr sz="525"/>
             </a:lvl5pPr>
-            <a:lvl6pPr marL="959891" indent="0">
-              <a:buNone/>
-              <a:defRPr sz="840"/>
+            <a:lvl6pPr marL="600075" indent="0">
+              <a:buNone/>
+              <a:defRPr sz="525"/>
             </a:lvl6pPr>
-            <a:lvl7pPr marL="1151870" indent="0">
-              <a:buNone/>
-              <a:defRPr sz="840"/>
+            <a:lvl7pPr marL="720090" indent="0">
+              <a:buNone/>
+              <a:defRPr sz="525"/>
             </a:lvl7pPr>
-            <a:lvl8pPr marL="1343848" indent="0">
-              <a:buNone/>
-              <a:defRPr sz="840"/>
+            <a:lvl8pPr marL="840105" indent="0">
+              <a:buNone/>
+              <a:defRPr sz="525"/>
             </a:lvl8pPr>
-            <a:lvl9pPr marL="1535826" indent="0">
-              <a:buNone/>
-              <a:defRPr sz="840"/>
+            <a:lvl9pPr marL="960120" indent="0">
+              <a:buNone/>
+              <a:defRPr sz="525"/>
             </a:lvl9pPr>
           </a:lstStyle>
           <a:p>
@@ -2285,8 +2285,8 @@
         </p:nvSpPr>
         <p:spPr>
           <a:xfrm>
-            <a:off x="719069" y="863918"/>
-            <a:ext cx="3366978" cy="1600514"/>
+            <a:off x="694356" y="540067"/>
+            <a:ext cx="3251264" cy="1000542"/>
           </a:xfrm>
         </p:spPr>
         <p:txBody>
@@ -2294,39 +2294,39 @@
           <a:lstStyle>
             <a:lvl1pPr marL="0" indent="0">
               <a:buNone/>
-              <a:defRPr sz="672"/>
+              <a:defRPr sz="420"/>
             </a:lvl1pPr>
-            <a:lvl2pPr marL="191978" indent="0">
-              <a:buNone/>
-              <a:defRPr sz="588"/>
+            <a:lvl2pPr marL="120015" indent="0">
+              <a:buNone/>
+              <a:defRPr sz="368"/>
             </a:lvl2pPr>
-            <a:lvl3pPr marL="383957" indent="0">
-              <a:buNone/>
-              <a:defRPr sz="504"/>
+            <a:lvl3pPr marL="240030" indent="0">
+              <a:buNone/>
+              <a:defRPr sz="315"/>
             </a:lvl3pPr>
-            <a:lvl4pPr marL="575935" indent="0">
-              <a:buNone/>
-              <a:defRPr sz="420"/>
+            <a:lvl4pPr marL="360045" indent="0">
+              <a:buNone/>
+              <a:defRPr sz="263"/>
             </a:lvl4pPr>
-            <a:lvl5pPr marL="767913" indent="0">
-              <a:buNone/>
-              <a:defRPr sz="420"/>
+            <a:lvl5pPr marL="480060" indent="0">
+              <a:buNone/>
+              <a:defRPr sz="263"/>
             </a:lvl5pPr>
-            <a:lvl6pPr marL="959891" indent="0">
-              <a:buNone/>
-              <a:defRPr sz="420"/>
+            <a:lvl6pPr marL="600075" indent="0">
+              <a:buNone/>
+              <a:defRPr sz="263"/>
             </a:lvl6pPr>
-            <a:lvl7pPr marL="1151870" indent="0">
-              <a:buNone/>
-              <a:defRPr sz="420"/>
+            <a:lvl7pPr marL="720090" indent="0">
+              <a:buNone/>
+              <a:defRPr sz="263"/>
             </a:lvl7pPr>
-            <a:lvl8pPr marL="1343848" indent="0">
-              <a:buNone/>
-              <a:defRPr sz="420"/>
+            <a:lvl8pPr marL="840105" indent="0">
+              <a:buNone/>
+              <a:defRPr sz="263"/>
             </a:lvl8pPr>
-            <a:lvl9pPr marL="1535826" indent="0">
-              <a:buNone/>
-              <a:defRPr sz="420"/>
+            <a:lvl9pPr marL="960120" indent="0">
+              <a:buNone/>
+              <a:defRPr sz="263"/>
             </a:lvl9pPr>
           </a:lstStyle>
           <a:p>
@@ -2355,7 +2355,7 @@
           <a:p>
             <a:fld id="{98DAC7ED-0124-4475-AB10-3A7CB843D580}" type="datetimeFigureOut">
               <a:rPr lang="de-AT" smtClean="0"/>
-              <a:t>14.04.2023</a:t>
+              <a:t>16.06.2026</a:t>
             </a:fld>
             <a:endParaRPr lang="de-AT"/>
           </a:p>
@@ -2406,7 +2406,7 @@
     </p:spTree>
     <p:extLst>
       <p:ext uri="{BB962C8B-B14F-4D97-AF65-F5344CB8AC3E}">
-        <p14:creationId xmlns:p14="http://schemas.microsoft.com/office/powerpoint/2010/main" val="1872422492"/>
+        <p14:creationId xmlns:p14="http://schemas.microsoft.com/office/powerpoint/2010/main" val="2303879445"/>
       </p:ext>
     </p:extLst>
   </p:cSld>
@@ -2450,8 +2450,8 @@
         </p:nvSpPr>
         <p:spPr>
           <a:xfrm>
-            <a:off x="717709" y="153319"/>
-            <a:ext cx="9003983" cy="556614"/>
+            <a:off x="693043" y="95846"/>
+            <a:ext cx="8694539" cy="347960"/>
           </a:xfrm>
           <a:prstGeom prst="rect">
             <a:avLst/>
@@ -2483,8 +2483,8 @@
         </p:nvSpPr>
         <p:spPr>
           <a:xfrm>
-            <a:off x="717709" y="766593"/>
-            <a:ext cx="9003983" cy="1827159"/>
+            <a:off x="693043" y="479227"/>
+            <a:ext cx="8694539" cy="1142226"/>
           </a:xfrm>
           <a:prstGeom prst="rect">
             <a:avLst/>
@@ -2545,8 +2545,8 @@
         </p:nvSpPr>
         <p:spPr>
           <a:xfrm>
-            <a:off x="717709" y="2669079"/>
-            <a:ext cx="2348865" cy="153319"/>
+            <a:off x="693043" y="1668542"/>
+            <a:ext cx="2268141" cy="95845"/>
           </a:xfrm>
           <a:prstGeom prst="rect">
             <a:avLst/>
@@ -2556,7 +2556,7 @@
           <a:bodyPr vert="horz" lIns="91440" tIns="45720" rIns="91440" bIns="45720" rtlCol="0" anchor="ctr"/>
           <a:lstStyle>
             <a:lvl1pPr algn="l">
-              <a:defRPr sz="504">
+              <a:defRPr sz="315">
                 <a:solidFill>
                   <a:schemeClr val="tx1">
                     <a:tint val="75000"/>
@@ -2568,7 +2568,7 @@
           <a:p>
             <a:fld id="{98DAC7ED-0124-4475-AB10-3A7CB843D580}" type="datetimeFigureOut">
               <a:rPr lang="de-AT" smtClean="0"/>
-              <a:t>14.04.2023</a:t>
+              <a:t>16.06.2026</a:t>
             </a:fld>
             <a:endParaRPr lang="de-AT"/>
           </a:p>
@@ -2586,8 +2586,8 @@
         </p:nvSpPr>
         <p:spPr>
           <a:xfrm>
-            <a:off x="3458051" y="2669079"/>
-            <a:ext cx="3523298" cy="153319"/>
+            <a:off x="3339207" y="1668542"/>
+            <a:ext cx="3402211" cy="95845"/>
           </a:xfrm>
           <a:prstGeom prst="rect">
             <a:avLst/>
@@ -2597,7 +2597,7 @@
           <a:bodyPr vert="horz" lIns="91440" tIns="45720" rIns="91440" bIns="45720" rtlCol="0" anchor="ctr"/>
           <a:lstStyle>
             <a:lvl1pPr algn="ctr">
-              <a:defRPr sz="504">
+              <a:defRPr sz="315">
                 <a:solidFill>
                   <a:schemeClr val="tx1">
                     <a:tint val="75000"/>
@@ -2623,8 +2623,8 @@
         </p:nvSpPr>
         <p:spPr>
           <a:xfrm>
-            <a:off x="7372826" y="2669079"/>
-            <a:ext cx="2348865" cy="153319"/>
+            <a:off x="7119441" y="1668542"/>
+            <a:ext cx="2268141" cy="95845"/>
           </a:xfrm>
           <a:prstGeom prst="rect">
             <a:avLst/>
@@ -2634,7 +2634,7 @@
           <a:bodyPr vert="horz" lIns="91440" tIns="45720" rIns="91440" bIns="45720" rtlCol="0" anchor="ctr"/>
           <a:lstStyle>
             <a:lvl1pPr algn="r">
-              <a:defRPr sz="504">
+              <a:defRPr sz="315">
                 <a:solidFill>
                   <a:schemeClr val="tx1">
                     <a:tint val="75000"/>
@@ -2655,27 +2655,27 @@
     </p:spTree>
     <p:extLst>
       <p:ext uri="{BB962C8B-B14F-4D97-AF65-F5344CB8AC3E}">
-        <p14:creationId xmlns:p14="http://schemas.microsoft.com/office/powerpoint/2010/main" val="992710587"/>
+        <p14:creationId xmlns:p14="http://schemas.microsoft.com/office/powerpoint/2010/main" val="2609116391"/>
       </p:ext>
     </p:extLst>
   </p:cSld>
   <p:clrMap bg1="lt1" tx1="dk1" bg2="lt2" tx2="dk2" accent1="accent1" accent2="accent2" accent3="accent3" accent4="accent4" accent5="accent5" accent6="accent6" hlink="hlink" folHlink="folHlink"/>
   <p:sldLayoutIdLst>
-    <p:sldLayoutId id="2147483685" r:id="rId1"/>
-    <p:sldLayoutId id="2147483686" r:id="rId2"/>
-    <p:sldLayoutId id="2147483687" r:id="rId3"/>
-    <p:sldLayoutId id="2147483688" r:id="rId4"/>
-    <p:sldLayoutId id="2147483689" r:id="rId5"/>
-    <p:sldLayoutId id="2147483690" r:id="rId6"/>
-    <p:sldLayoutId id="2147483691" r:id="rId7"/>
-    <p:sldLayoutId id="2147483692" r:id="rId8"/>
-    <p:sldLayoutId id="2147483693" r:id="rId9"/>
-    <p:sldLayoutId id="2147483694" r:id="rId10"/>
-    <p:sldLayoutId id="2147483695" r:id="rId11"/>
+    <p:sldLayoutId id="2147483709" r:id="rId1"/>
+    <p:sldLayoutId id="2147483710" r:id="rId2"/>
+    <p:sldLayoutId id="2147483711" r:id="rId3"/>
+    <p:sldLayoutId id="2147483712" r:id="rId4"/>
+    <p:sldLayoutId id="2147483713" r:id="rId5"/>
+    <p:sldLayoutId id="2147483714" r:id="rId6"/>
+    <p:sldLayoutId id="2147483715" r:id="rId7"/>
+    <p:sldLayoutId id="2147483716" r:id="rId8"/>
+    <p:sldLayoutId id="2147483717" r:id="rId9"/>
+    <p:sldLayoutId id="2147483718" r:id="rId10"/>
+    <p:sldLayoutId id="2147483719" r:id="rId11"/>
   </p:sldLayoutIdLst>
   <p:txStyles>
     <p:titleStyle>
-      <a:lvl1pPr algn="l" defTabSz="383957" rtl="0" eaLnBrk="1" latinLnBrk="0" hangingPunct="1">
+      <a:lvl1pPr algn="l" defTabSz="240030" rtl="0" eaLnBrk="1" latinLnBrk="0" hangingPunct="1">
         <a:lnSpc>
           <a:spcPct val="90000"/>
         </a:lnSpc>
@@ -2683,7 +2683,7 @@
           <a:spcPct val="0"/>
         </a:spcBef>
         <a:buNone/>
-        <a:defRPr sz="1848" kern="1200">
+        <a:defRPr sz="1155" kern="1200">
           <a:solidFill>
             <a:schemeClr val="tx1"/>
           </a:solidFill>
@@ -2694,16 +2694,16 @@
       </a:lvl1pPr>
     </p:titleStyle>
     <p:bodyStyle>
-      <a:lvl1pPr marL="95989" indent="-95989" algn="l" defTabSz="383957" rtl="0" eaLnBrk="1" latinLnBrk="0" hangingPunct="1">
+      <a:lvl1pPr marL="60008" indent="-60008" algn="l" defTabSz="240030" rtl="0" eaLnBrk="1" latinLnBrk="0" hangingPunct="1">
         <a:lnSpc>
           <a:spcPct val="90000"/>
         </a:lnSpc>
         <a:spcBef>
-          <a:spcPts val="420"/>
+          <a:spcPts val="263"/>
         </a:spcBef>
         <a:buFont typeface="Arial" panose="020B0604020202020204" pitchFamily="34" charset="0"/>
         <a:buChar char="•"/>
-        <a:defRPr sz="1176" kern="1200">
+        <a:defRPr sz="735" kern="1200">
           <a:solidFill>
             <a:schemeClr val="tx1"/>
           </a:solidFill>
@@ -2712,16 +2712,16 @@
           <a:cs typeface="+mn-cs"/>
         </a:defRPr>
       </a:lvl1pPr>
-      <a:lvl2pPr marL="287967" indent="-95989" algn="l" defTabSz="383957" rtl="0" eaLnBrk="1" latinLnBrk="0" hangingPunct="1">
+      <a:lvl2pPr marL="180023" indent="-60008" algn="l" defTabSz="240030" rtl="0" eaLnBrk="1" latinLnBrk="0" hangingPunct="1">
         <a:lnSpc>
           <a:spcPct val="90000"/>
         </a:lnSpc>
         <a:spcBef>
-          <a:spcPts val="210"/>
+          <a:spcPts val="131"/>
         </a:spcBef>
         <a:buFont typeface="Arial" panose="020B0604020202020204" pitchFamily="34" charset="0"/>
         <a:buChar char="•"/>
-        <a:defRPr sz="1008" kern="1200">
+        <a:defRPr sz="630" kern="1200">
           <a:solidFill>
             <a:schemeClr val="tx1"/>
           </a:solidFill>
@@ -2730,16 +2730,16 @@
           <a:cs typeface="+mn-cs"/>
         </a:defRPr>
       </a:lvl2pPr>
-      <a:lvl3pPr marL="479946" indent="-95989" algn="l" defTabSz="383957" rtl="0" eaLnBrk="1" latinLnBrk="0" hangingPunct="1">
+      <a:lvl3pPr marL="300038" indent="-60008" algn="l" defTabSz="240030" rtl="0" eaLnBrk="1" latinLnBrk="0" hangingPunct="1">
         <a:lnSpc>
           <a:spcPct val="90000"/>
         </a:lnSpc>
         <a:spcBef>
-          <a:spcPts val="210"/>
+          <a:spcPts val="131"/>
         </a:spcBef>
         <a:buFont typeface="Arial" panose="020B0604020202020204" pitchFamily="34" charset="0"/>
         <a:buChar char="•"/>
-        <a:defRPr sz="840" kern="1200">
+        <a:defRPr sz="525" kern="1200">
           <a:solidFill>
             <a:schemeClr val="tx1"/>
           </a:solidFill>
@@ -2748,16 +2748,16 @@
           <a:cs typeface="+mn-cs"/>
         </a:defRPr>
       </a:lvl3pPr>
-      <a:lvl4pPr marL="671924" indent="-95989" algn="l" defTabSz="383957" rtl="0" eaLnBrk="1" latinLnBrk="0" hangingPunct="1">
+      <a:lvl4pPr marL="420053" indent="-60008" algn="l" defTabSz="240030" rtl="0" eaLnBrk="1" latinLnBrk="0" hangingPunct="1">
         <a:lnSpc>
           <a:spcPct val="90000"/>
         </a:lnSpc>
         <a:spcBef>
-          <a:spcPts val="210"/>
+          <a:spcPts val="131"/>
         </a:spcBef>
         <a:buFont typeface="Arial" panose="020B0604020202020204" pitchFamily="34" charset="0"/>
         <a:buChar char="•"/>
-        <a:defRPr sz="756" kern="1200">
+        <a:defRPr sz="472" kern="1200">
           <a:solidFill>
             <a:schemeClr val="tx1"/>
           </a:solidFill>
@@ -2766,16 +2766,16 @@
           <a:cs typeface="+mn-cs"/>
         </a:defRPr>
       </a:lvl4pPr>
-      <a:lvl5pPr marL="863902" indent="-95989" algn="l" defTabSz="383957" rtl="0" eaLnBrk="1" latinLnBrk="0" hangingPunct="1">
+      <a:lvl5pPr marL="540068" indent="-60008" algn="l" defTabSz="240030" rtl="0" eaLnBrk="1" latinLnBrk="0" hangingPunct="1">
         <a:lnSpc>
           <a:spcPct val="90000"/>
         </a:lnSpc>
         <a:spcBef>
-          <a:spcPts val="210"/>
+          <a:spcPts val="131"/>
         </a:spcBef>
         <a:buFont typeface="Arial" panose="020B0604020202020204" pitchFamily="34" charset="0"/>
         <a:buChar char="•"/>
-        <a:defRPr sz="756" kern="1200">
+        <a:defRPr sz="472" kern="1200">
           <a:solidFill>
             <a:schemeClr val="tx1"/>
           </a:solidFill>
@@ -2784,16 +2784,16 @@
           <a:cs typeface="+mn-cs"/>
         </a:defRPr>
       </a:lvl5pPr>
-      <a:lvl6pPr marL="1055881" indent="-95989" algn="l" defTabSz="383957" rtl="0" eaLnBrk="1" latinLnBrk="0" hangingPunct="1">
+      <a:lvl6pPr marL="660083" indent="-60008" algn="l" defTabSz="240030" rtl="0" eaLnBrk="1" latinLnBrk="0" hangingPunct="1">
         <a:lnSpc>
           <a:spcPct val="90000"/>
         </a:lnSpc>
         <a:spcBef>
-          <a:spcPts val="210"/>
+          <a:spcPts val="131"/>
         </a:spcBef>
         <a:buFont typeface="Arial" panose="020B0604020202020204" pitchFamily="34" charset="0"/>
         <a:buChar char="•"/>
-        <a:defRPr sz="756" kern="1200">
+        <a:defRPr sz="472" kern="1200">
           <a:solidFill>
             <a:schemeClr val="tx1"/>
           </a:solidFill>
@@ -2802,16 +2802,16 @@
           <a:cs typeface="+mn-cs"/>
         </a:defRPr>
       </a:lvl6pPr>
-      <a:lvl7pPr marL="1247859" indent="-95989" algn="l" defTabSz="383957" rtl="0" eaLnBrk="1" latinLnBrk="0" hangingPunct="1">
+      <a:lvl7pPr marL="780098" indent="-60008" algn="l" defTabSz="240030" rtl="0" eaLnBrk="1" latinLnBrk="0" hangingPunct="1">
         <a:lnSpc>
           <a:spcPct val="90000"/>
         </a:lnSpc>
         <a:spcBef>
-          <a:spcPts val="210"/>
+          <a:spcPts val="131"/>
         </a:spcBef>
         <a:buFont typeface="Arial" panose="020B0604020202020204" pitchFamily="34" charset="0"/>
         <a:buChar char="•"/>
-        <a:defRPr sz="756" kern="1200">
+        <a:defRPr sz="472" kern="1200">
           <a:solidFill>
             <a:schemeClr val="tx1"/>
           </a:solidFill>
@@ -2820,16 +2820,16 @@
           <a:cs typeface="+mn-cs"/>
         </a:defRPr>
       </a:lvl7pPr>
-      <a:lvl8pPr marL="1439837" indent="-95989" algn="l" defTabSz="383957" rtl="0" eaLnBrk="1" latinLnBrk="0" hangingPunct="1">
+      <a:lvl8pPr marL="900113" indent="-60008" algn="l" defTabSz="240030" rtl="0" eaLnBrk="1" latinLnBrk="0" hangingPunct="1">
         <a:lnSpc>
           <a:spcPct val="90000"/>
         </a:lnSpc>
         <a:spcBef>
-          <a:spcPts val="210"/>
+          <a:spcPts val="131"/>
         </a:spcBef>
         <a:buFont typeface="Arial" panose="020B0604020202020204" pitchFamily="34" charset="0"/>
         <a:buChar char="•"/>
-        <a:defRPr sz="756" kern="1200">
+        <a:defRPr sz="472" kern="1200">
           <a:solidFill>
             <a:schemeClr val="tx1"/>
           </a:solidFill>
@@ -2838,16 +2838,16 @@
           <a:cs typeface="+mn-cs"/>
         </a:defRPr>
       </a:lvl8pPr>
-      <a:lvl9pPr marL="1631815" indent="-95989" algn="l" defTabSz="383957" rtl="0" eaLnBrk="1" latinLnBrk="0" hangingPunct="1">
+      <a:lvl9pPr marL="1020128" indent="-60008" algn="l" defTabSz="240030" rtl="0" eaLnBrk="1" latinLnBrk="0" hangingPunct="1">
         <a:lnSpc>
           <a:spcPct val="90000"/>
         </a:lnSpc>
         <a:spcBef>
-          <a:spcPts val="210"/>
+          <a:spcPts val="131"/>
         </a:spcBef>
         <a:buFont typeface="Arial" panose="020B0604020202020204" pitchFamily="34" charset="0"/>
         <a:buChar char="•"/>
-        <a:defRPr sz="756" kern="1200">
+        <a:defRPr sz="472" kern="1200">
           <a:solidFill>
             <a:schemeClr val="tx1"/>
           </a:solidFill>
@@ -2861,8 +2861,8 @@
       <a:defPPr>
         <a:defRPr lang="en-US"/>
       </a:defPPr>
-      <a:lvl1pPr marL="0" algn="l" defTabSz="383957" rtl="0" eaLnBrk="1" latinLnBrk="0" hangingPunct="1">
-        <a:defRPr sz="756" kern="1200">
+      <a:lvl1pPr marL="0" algn="l" defTabSz="240030" rtl="0" eaLnBrk="1" latinLnBrk="0" hangingPunct="1">
+        <a:defRPr sz="472" kern="1200">
           <a:solidFill>
             <a:schemeClr val="tx1"/>
           </a:solidFill>
@@ -2871,8 +2871,8 @@
           <a:cs typeface="+mn-cs"/>
         </a:defRPr>
       </a:lvl1pPr>
-      <a:lvl2pPr marL="191978" algn="l" defTabSz="383957" rtl="0" eaLnBrk="1" latinLnBrk="0" hangingPunct="1">
-        <a:defRPr sz="756" kern="1200">
+      <a:lvl2pPr marL="120015" algn="l" defTabSz="240030" rtl="0" eaLnBrk="1" latinLnBrk="0" hangingPunct="1">
+        <a:defRPr sz="472" kern="1200">
           <a:solidFill>
             <a:schemeClr val="tx1"/>
           </a:solidFill>
@@ -2881,8 +2881,8 @@
           <a:cs typeface="+mn-cs"/>
         </a:defRPr>
       </a:lvl2pPr>
-      <a:lvl3pPr marL="383957" algn="l" defTabSz="383957" rtl="0" eaLnBrk="1" latinLnBrk="0" hangingPunct="1">
-        <a:defRPr sz="756" kern="1200">
+      <a:lvl3pPr marL="240030" algn="l" defTabSz="240030" rtl="0" eaLnBrk="1" latinLnBrk="0" hangingPunct="1">
+        <a:defRPr sz="472" kern="1200">
           <a:solidFill>
             <a:schemeClr val="tx1"/>
           </a:solidFill>
@@ -2891,8 +2891,8 @@
           <a:cs typeface="+mn-cs"/>
         </a:defRPr>
       </a:lvl3pPr>
-      <a:lvl4pPr marL="575935" algn="l" defTabSz="383957" rtl="0" eaLnBrk="1" latinLnBrk="0" hangingPunct="1">
-        <a:defRPr sz="756" kern="1200">
+      <a:lvl4pPr marL="360045" algn="l" defTabSz="240030" rtl="0" eaLnBrk="1" latinLnBrk="0" hangingPunct="1">
+        <a:defRPr sz="472" kern="1200">
           <a:solidFill>
             <a:schemeClr val="tx1"/>
           </a:solidFill>
@@ -2901,8 +2901,8 @@
           <a:cs typeface="+mn-cs"/>
         </a:defRPr>
       </a:lvl4pPr>
-      <a:lvl5pPr marL="767913" algn="l" defTabSz="383957" rtl="0" eaLnBrk="1" latinLnBrk="0" hangingPunct="1">
-        <a:defRPr sz="756" kern="1200">
+      <a:lvl5pPr marL="480060" algn="l" defTabSz="240030" rtl="0" eaLnBrk="1" latinLnBrk="0" hangingPunct="1">
+        <a:defRPr sz="472" kern="1200">
           <a:solidFill>
             <a:schemeClr val="tx1"/>
           </a:solidFill>
@@ -2911,8 +2911,8 @@
           <a:cs typeface="+mn-cs"/>
         </a:defRPr>
       </a:lvl5pPr>
-      <a:lvl6pPr marL="959891" algn="l" defTabSz="383957" rtl="0" eaLnBrk="1" latinLnBrk="0" hangingPunct="1">
-        <a:defRPr sz="756" kern="1200">
+      <a:lvl6pPr marL="600075" algn="l" defTabSz="240030" rtl="0" eaLnBrk="1" latinLnBrk="0" hangingPunct="1">
+        <a:defRPr sz="472" kern="1200">
           <a:solidFill>
             <a:schemeClr val="tx1"/>
           </a:solidFill>
@@ -2921,8 +2921,8 @@
           <a:cs typeface="+mn-cs"/>
         </a:defRPr>
       </a:lvl6pPr>
-      <a:lvl7pPr marL="1151870" algn="l" defTabSz="383957" rtl="0" eaLnBrk="1" latinLnBrk="0" hangingPunct="1">
-        <a:defRPr sz="756" kern="1200">
+      <a:lvl7pPr marL="720090" algn="l" defTabSz="240030" rtl="0" eaLnBrk="1" latinLnBrk="0" hangingPunct="1">
+        <a:defRPr sz="472" kern="1200">
           <a:solidFill>
             <a:schemeClr val="tx1"/>
           </a:solidFill>
@@ -2931,8 +2931,8 @@
           <a:cs typeface="+mn-cs"/>
         </a:defRPr>
       </a:lvl7pPr>
-      <a:lvl8pPr marL="1343848" algn="l" defTabSz="383957" rtl="0" eaLnBrk="1" latinLnBrk="0" hangingPunct="1">
-        <a:defRPr sz="756" kern="1200">
+      <a:lvl8pPr marL="840105" algn="l" defTabSz="240030" rtl="0" eaLnBrk="1" latinLnBrk="0" hangingPunct="1">
+        <a:defRPr sz="472" kern="1200">
           <a:solidFill>
             <a:schemeClr val="tx1"/>
           </a:solidFill>
@@ -2941,8 +2941,8 @@
           <a:cs typeface="+mn-cs"/>
         </a:defRPr>
       </a:lvl8pPr>
-      <a:lvl9pPr marL="1535826" algn="l" defTabSz="383957" rtl="0" eaLnBrk="1" latinLnBrk="0" hangingPunct="1">
-        <a:defRPr sz="756" kern="1200">
+      <a:lvl9pPr marL="960120" algn="l" defTabSz="240030" rtl="0" eaLnBrk="1" latinLnBrk="0" hangingPunct="1">
+        <a:defRPr sz="472" kern="1200">
           <a:solidFill>
             <a:schemeClr val="tx1"/>
           </a:solidFill>
@@ -2975,7 +2975,7 @@
       </p:grpSpPr>
       <p:sp>
         <p:nvSpPr>
-          <p:cNvPr id="86" name="TextBox 85">
+          <p:cNvPr id="16" name="TextBox 15">
             <a:extLst>
               <a:ext uri="{FF2B5EF4-FFF2-40B4-BE49-F238E27FC236}">
                 <a16:creationId xmlns:a16="http://schemas.microsoft.com/office/drawing/2014/main" id="{ABA3453E-A4C6-4F56-9212-606CBA299D0A}"/>
@@ -2987,7 +2987,7 @@
         </p:nvSpPr>
         <p:spPr>
           <a:xfrm>
-            <a:off x="563107" y="777081"/>
+            <a:off x="323264" y="237331"/>
             <a:ext cx="1355317" cy="1325562"/>
           </a:xfrm>
           <a:prstGeom prst="rect">
@@ -3019,7 +3019,7 @@
       </p:sp>
       <p:sp>
         <p:nvSpPr>
-          <p:cNvPr id="89" name="TextBox 88">
+          <p:cNvPr id="18" name="TextBox 17">
             <a:extLst>
               <a:ext uri="{FF2B5EF4-FFF2-40B4-BE49-F238E27FC236}">
                 <a16:creationId xmlns:a16="http://schemas.microsoft.com/office/drawing/2014/main" id="{08788219-EB4D-409E-B07C-5730BB942A1F}"/>
@@ -3031,7 +3031,7 @@
         </p:nvSpPr>
         <p:spPr>
           <a:xfrm>
-            <a:off x="8542700" y="777082"/>
+            <a:off x="8302857" y="237332"/>
             <a:ext cx="1459808" cy="1325559"/>
           </a:xfrm>
           <a:prstGeom prst="rect">
@@ -3066,7 +3066,7 @@
       </p:sp>
       <p:cxnSp>
         <p:nvCxnSpPr>
-          <p:cNvPr id="91" name="Straight Arrow Connector 90">
+          <p:cNvPr id="19" name="Straight Arrow Connector 18">
             <a:extLst>
               <a:ext uri="{FF2B5EF4-FFF2-40B4-BE49-F238E27FC236}">
                 <a16:creationId xmlns:a16="http://schemas.microsoft.com/office/drawing/2014/main" id="{463C70AE-6F58-4FAC-9346-8DC6FEF4A6FB}"/>
@@ -3075,14 +3075,14 @@
           </p:cNvPr>
           <p:cNvCxnSpPr>
             <a:cxnSpLocks/>
-            <a:stCxn id="86" idx="3"/>
-            <a:endCxn id="8" idx="1"/>
+            <a:stCxn id="16" idx="3"/>
+            <a:endCxn id="21" idx="1"/>
           </p:cNvCxnSpPr>
           <p:nvPr/>
         </p:nvCxnSpPr>
         <p:spPr>
           <a:xfrm>
-            <a:off x="1918424" y="1439862"/>
+            <a:off x="1678581" y="900112"/>
             <a:ext cx="1250049" cy="0"/>
           </a:xfrm>
           <a:prstGeom prst="straightConnector1">
@@ -3113,7 +3113,7 @@
       </p:cxnSp>
       <p:sp>
         <p:nvSpPr>
-          <p:cNvPr id="113" name="TextBox 112">
+          <p:cNvPr id="20" name="TextBox 19">
             <a:extLst>
               <a:ext uri="{FF2B5EF4-FFF2-40B4-BE49-F238E27FC236}">
                 <a16:creationId xmlns:a16="http://schemas.microsoft.com/office/drawing/2014/main" id="{20179043-4531-4318-ADDA-3275527A9200}"/>
@@ -3125,7 +3125,7 @@
         </p:nvSpPr>
         <p:spPr>
           <a:xfrm>
-            <a:off x="7491742" y="1439858"/>
+            <a:off x="7251899" y="900108"/>
             <a:ext cx="801554" cy="648000"/>
           </a:xfrm>
           <a:prstGeom prst="rect">
@@ -3156,7 +3156,7 @@
       </p:sp>
       <p:sp>
         <p:nvSpPr>
-          <p:cNvPr id="8" name="TextBox 7">
+          <p:cNvPr id="21" name="TextBox 20">
             <a:extLst>
               <a:ext uri="{FF2B5EF4-FFF2-40B4-BE49-F238E27FC236}">
                 <a16:creationId xmlns:a16="http://schemas.microsoft.com/office/drawing/2014/main" id="{E39D164D-B463-609D-769B-B9DDB7374A1D}"/>
@@ -3168,7 +3168,7 @@
         </p:nvSpPr>
         <p:spPr>
           <a:xfrm>
-            <a:off x="3168473" y="777081"/>
+            <a:off x="2928630" y="237331"/>
             <a:ext cx="1459808" cy="1325562"/>
           </a:xfrm>
           <a:prstGeom prst="rect">
@@ -3199,7 +3199,7 @@
       </p:sp>
       <p:cxnSp>
         <p:nvCxnSpPr>
-          <p:cNvPr id="10" name="Straight Arrow Connector 9">
+          <p:cNvPr id="23" name="Straight Arrow Connector 22">
             <a:extLst>
               <a:ext uri="{FF2B5EF4-FFF2-40B4-BE49-F238E27FC236}">
                 <a16:creationId xmlns:a16="http://schemas.microsoft.com/office/drawing/2014/main" id="{4CAF8D07-E108-688A-18D4-E7B0B6E3B77D}"/>
@@ -3208,14 +3208,14 @@
           </p:cNvPr>
           <p:cNvCxnSpPr>
             <a:cxnSpLocks/>
-            <a:stCxn id="15" idx="3"/>
-            <a:endCxn id="89" idx="1"/>
+            <a:stCxn id="24" idx="3"/>
+            <a:endCxn id="18" idx="1"/>
           </p:cNvCxnSpPr>
           <p:nvPr/>
         </p:nvCxnSpPr>
         <p:spPr>
           <a:xfrm>
-            <a:off x="7146714" y="1439861"/>
+            <a:off x="6906871" y="900111"/>
             <a:ext cx="1395987" cy="0"/>
           </a:xfrm>
           <a:prstGeom prst="straightConnector1">
@@ -3246,7 +3246,7 @@
       </p:cxnSp>
       <p:sp>
         <p:nvSpPr>
-          <p:cNvPr id="15" name="TextBox 14">
+          <p:cNvPr id="24" name="TextBox 23">
             <a:extLst>
               <a:ext uri="{FF2B5EF4-FFF2-40B4-BE49-F238E27FC236}">
                 <a16:creationId xmlns:a16="http://schemas.microsoft.com/office/drawing/2014/main" id="{F597736E-CD45-0661-6189-EFCB4B9458CF}"/>
@@ -3258,7 +3258,7 @@
         </p:nvSpPr>
         <p:spPr>
           <a:xfrm>
-            <a:off x="5686905" y="777082"/>
+            <a:off x="5447062" y="237332"/>
             <a:ext cx="1459808" cy="1325559"/>
           </a:xfrm>
           <a:prstGeom prst="rect">
@@ -3316,7 +3316,7 @@
       </p:sp>
       <p:cxnSp>
         <p:nvCxnSpPr>
-          <p:cNvPr id="17" name="Straight Arrow Connector 16">
+          <p:cNvPr id="25" name="Straight Arrow Connector 24">
             <a:extLst>
               <a:ext uri="{FF2B5EF4-FFF2-40B4-BE49-F238E27FC236}">
                 <a16:creationId xmlns:a16="http://schemas.microsoft.com/office/drawing/2014/main" id="{BDE3D9DC-2669-1AC7-0340-120FC6CAAFEC}"/>
@@ -3325,14 +3325,14 @@
           </p:cNvPr>
           <p:cNvCxnSpPr>
             <a:cxnSpLocks/>
-            <a:stCxn id="8" idx="3"/>
-            <a:endCxn id="15" idx="1"/>
+            <a:stCxn id="21" idx="3"/>
+            <a:endCxn id="24" idx="1"/>
           </p:cNvCxnSpPr>
           <p:nvPr/>
         </p:nvCxnSpPr>
         <p:spPr>
           <a:xfrm>
-            <a:off x="4628281" y="1439862"/>
+            <a:off x="4388438" y="900112"/>
             <a:ext cx="1058624" cy="0"/>
           </a:xfrm>
           <a:prstGeom prst="straightConnector1">
@@ -3363,7 +3363,7 @@
       </p:cxnSp>
       <p:sp>
         <p:nvSpPr>
-          <p:cNvPr id="22" name="TextBox 21">
+          <p:cNvPr id="26" name="TextBox 25">
             <a:extLst>
               <a:ext uri="{FF2B5EF4-FFF2-40B4-BE49-F238E27FC236}">
                 <a16:creationId xmlns:a16="http://schemas.microsoft.com/office/drawing/2014/main" id="{EE1673AF-74FE-6E2B-A681-6F1702A3B7F4}"/>
@@ -3375,7 +3375,7 @@
         </p:nvSpPr>
         <p:spPr>
           <a:xfrm>
-            <a:off x="2167827" y="1439860"/>
+            <a:off x="1927984" y="900110"/>
             <a:ext cx="751241" cy="731837"/>
           </a:xfrm>
           <a:prstGeom prst="rect">
@@ -3399,7 +3399,7 @@
       </p:sp>
       <p:sp>
         <p:nvSpPr>
-          <p:cNvPr id="2" name="TextBox 1">
+          <p:cNvPr id="27" name="TextBox 26">
             <a:extLst>
               <a:ext uri="{FF2B5EF4-FFF2-40B4-BE49-F238E27FC236}">
                 <a16:creationId xmlns:a16="http://schemas.microsoft.com/office/drawing/2014/main" id="{4DE9401F-206B-0780-FDDA-8C9FB17DC4EB}"/>
@@ -3411,7 +3411,7 @@
         </p:nvSpPr>
         <p:spPr>
           <a:xfrm>
-            <a:off x="4760900" y="1439860"/>
+            <a:off x="4521057" y="900110"/>
             <a:ext cx="926004" cy="528543"/>
           </a:xfrm>
           <a:prstGeom prst="rect">
@@ -3447,9 +3447,9 @@
 </file>
 
 <file path=ppt/theme/theme1.xml><?xml version="1.0" encoding="utf-8"?>
-<a:theme xmlns:a="http://schemas.openxmlformats.org/drawingml/2006/main" name="Office Theme">
+<a:theme xmlns:a="http://schemas.openxmlformats.org/drawingml/2006/main" name="Office 2013 - 2022 Theme">
   <a:themeElements>
-    <a:clrScheme name="Office Theme">
+    <a:clrScheme name="Office 2013 - 2022 Theme">
       <a:dk1>
         <a:sysClr val="windowText" lastClr="000000"/>
       </a:dk1>
@@ -3487,7 +3487,7 @@
         <a:srgbClr val="954F72"/>
       </a:folHlink>
     </a:clrScheme>
-    <a:fontScheme name="Office Theme">
+    <a:fontScheme name="Office 2013 - 2022 Theme">
       <a:majorFont>
         <a:latin typeface="Calibri Light" panose="020F0302020204030204"/>
         <a:ea typeface=""/>
@@ -3559,7 +3559,7 @@
         <a:font script="Geor" typeface="Sylfaen"/>
       </a:minorFont>
     </a:fontScheme>
-    <a:fmtScheme name="Office Theme">
+    <a:fmtScheme name="Office 2013 - 2022 Theme">
       <a:fillStyleLst>
         <a:solidFill>
           <a:schemeClr val="phClr"/>
@@ -3701,7 +3701,7 @@
   <a:extraClrSchemeLst/>
   <a:extLst>
     <a:ext uri="{05A4C25C-085E-4340-85A3-A5531E510DB2}">
-      <thm15:themeFamily xmlns:thm15="http://schemas.microsoft.com/office/thememl/2012/main" name="Office Theme" id="{62F939B6-93AF-4DB8-9C6B-D6C7DFDC589F}" vid="{4A3C46E8-61CC-4603-A589-7422A47A8E4A}"/>
+      <thm15:themeFamily xmlns:thm15="http://schemas.microsoft.com/office/thememl/2012/main" name="Office 2013 - 2022 Theme" id="{62F939B6-93AF-4DB8-9C6B-D6C7DFDC589F}" vid="{4A3C46E8-61CC-4603-A589-7422A47A8E4A}"/>
     </a:ext>
   </a:extLst>
 </a:theme>
